--- a/dist/초6/영어/의사소통/초6_영어_의사소통_03_세계문화존중_학생용.pptx
+++ b/dist/초6/영어/의사소통/초6_영어_의사소통_03_세계문화존중_학생용.pptx
@@ -120,13 +120,13 @@
   <p:extLst>
     <p:ext uri="{521415D9-36F7-43E2-AB2F-B90AF26B5E84}">
       <p14:sectionLst xmlns:p14="http://schemas.microsoft.com/office/powerpoint/2010/main">
-        <p14:section name="도입" id="{f9165076-1ee7-bff4-a562-89ff836392ae}">
+        <p14:section name="도입" id="{32b7afa1-c623-1462-11d1-a35905271d97}">
           <p14:sldIdLst>
             <p14:sldId id="256"/>
             <p14:sldId id="257"/>
           </p14:sldIdLst>
         </p14:section>
-        <p14:section name="개념" id="{2f45701f-1a8b-a4c5-37de-4471f7756591}">
+        <p14:section name="개념" id="{2f6929f7-9803-1d9b-d000-0a90b4e60f8a}">
           <p14:sldIdLst>
             <p14:sldId id="258"/>
             <p14:sldId id="259"/>
@@ -134,7 +134,7 @@
             <p14:sldId id="261"/>
           </p14:sldIdLst>
         </p14:section>
-        <p14:section name="연습" id="{f0a23f3e-8f83-ebd2-37e3-f2f345f48185}">
+        <p14:section name="연습" id="{afa91b9f-c80d-c618-7bfb-23351b63eddd}">
           <p14:sldIdLst>
             <p14:sldId id="262"/>
             <p14:sldId id="263"/>
@@ -142,18 +142,18 @@
             <p14:sldId id="265"/>
           </p14:sldIdLst>
         </p14:section>
-        <p14:section name="확인" id="{80d86cc7-2113-89e9-a6e3-5baed8a528e1}">
+        <p14:section name="확인" id="{6c2bf2b9-78a7-cba0-c765-a28077ee3494}">
           <p14:sldIdLst>
             <p14:sldId id="266"/>
             <p14:sldId id="267"/>
           </p14:sldIdLst>
         </p14:section>
-        <p14:section name="정리" id="{1c213ba8-8e2e-2614-0ffb-473ad939d61e}">
+        <p14:section name="정리" id="{38f1c416-6cd1-4d96-6590-410a3a84dd36}">
           <p14:sldIdLst>
             <p14:sldId id="268"/>
           </p14:sldIdLst>
         </p14:section>
-        <p14:section name="보충" id="{3a9750fb-5313-7e18-897a-720099240611}">
+        <p14:section name="보충" id="{a2cc5167-2d01-a132-ccec-6700a422cf82}">
           <p14:sldIdLst>
             <p14:sldId id="269"/>
           </p14:sldIdLst>
